--- a/海泩/家庭教育/assert/双语故事L1.pptx
+++ b/海泩/家庭教育/assert/双语故事L1.pptx
@@ -5,13 +5,14 @@
     <p:sldMasterId id="2147483672" r:id="rId1"/>
   </p:sldMasterIdLst>
   <p:notesMasterIdLst>
-    <p:notesMasterId r:id="rId6"/>
+    <p:notesMasterId r:id="rId7"/>
   </p:notesMasterIdLst>
   <p:sldIdLst>
     <p:sldId id="256" r:id="rId2"/>
     <p:sldId id="257" r:id="rId3"/>
     <p:sldId id="258" r:id="rId4"/>
     <p:sldId id="259" r:id="rId5"/>
+    <p:sldId id="260" r:id="rId6"/>
   </p:sldIdLst>
   <p:sldSz cx="6858000" cy="9906000" type="A4"/>
   <p:notesSz cx="6858000" cy="9144000"/>
@@ -111,6 +112,23 @@
     </a:lvl9pPr>
   </p:defaultTextStyle>
   <p:extLst>
+    <p:ext uri="{521415D9-36F7-43E2-AB2F-B90AF26B5E84}">
+      <p14:sectionLst xmlns:p14="http://schemas.microsoft.com/office/powerpoint/2010/main">
+        <p14:section name="101" id="{E15D5170-F656-6444-8415-E786FCC7354A}">
+          <p14:sldIdLst>
+            <p14:sldId id="256"/>
+            <p14:sldId id="257"/>
+            <p14:sldId id="258"/>
+            <p14:sldId id="259"/>
+          </p14:sldIdLst>
+        </p14:section>
+        <p14:section name="102" id="{BCC6443D-D4AB-D244-932F-DEBB5FDC9FFC}">
+          <p14:sldIdLst>
+            <p14:sldId id="260"/>
+          </p14:sldIdLst>
+        </p14:section>
+      </p14:sectionLst>
+    </p:ext>
     <p:ext uri="{EFAFB233-063F-42B5-8137-9DF3F51BA10A}">
       <p15:sldGuideLst xmlns:p15="http://schemas.microsoft.com/office/powerpoint/2012/main"/>
     </p:ext>
@@ -5894,6 +5912,65 @@
     <p:extLst>
       <p:ext uri="{BB962C8B-B14F-4D97-AF65-F5344CB8AC3E}">
         <p14:creationId xmlns:p14="http://schemas.microsoft.com/office/powerpoint/2010/main" val="3938343278"/>
+      </p:ext>
+    </p:extLst>
+  </p:cSld>
+  <p:clrMapOvr>
+    <a:masterClrMapping/>
+  </p:clrMapOvr>
+</p:sld>
+</file>
+
+<file path=ppt/slides/slide5.xml><?xml version="1.0" encoding="utf-8"?>
+<p:sld xmlns:a="http://schemas.openxmlformats.org/drawingml/2006/main" xmlns:r="http://schemas.openxmlformats.org/officeDocument/2006/relationships" xmlns:p="http://schemas.openxmlformats.org/presentationml/2006/main">
+  <p:cSld>
+    <p:spTree>
+      <p:nvGrpSpPr>
+        <p:cNvPr id="1" name=""/>
+        <p:cNvGrpSpPr/>
+        <p:nvPr/>
+      </p:nvGrpSpPr>
+      <p:grpSpPr>
+        <a:xfrm>
+          <a:off x="0" y="0"/>
+          <a:ext cx="0" cy="0"/>
+          <a:chOff x="0" y="0"/>
+          <a:chExt cx="0" cy="0"/>
+        </a:xfrm>
+      </p:grpSpPr>
+      <p:sp>
+        <p:nvSpPr>
+          <p:cNvPr id="4" name="Slide Number Placeholder 3">
+            <a:extLst>
+              <a:ext uri="{FF2B5EF4-FFF2-40B4-BE49-F238E27FC236}">
+                <a16:creationId xmlns:a16="http://schemas.microsoft.com/office/drawing/2014/main" id="{6FF7F416-8764-89CF-0812-0CEED2C43E32}"/>
+              </a:ext>
+            </a:extLst>
+          </p:cNvPr>
+          <p:cNvSpPr>
+            <a:spLocks noGrp="1"/>
+          </p:cNvSpPr>
+          <p:nvPr>
+            <p:ph type="sldNum" sz="quarter" idx="12"/>
+          </p:nvPr>
+        </p:nvSpPr>
+        <p:spPr/>
+        <p:txBody>
+          <a:bodyPr/>
+          <a:lstStyle/>
+          <a:p>
+            <a:fld id="{09D18141-EABD-1941-A9BC-32C3BC21E60E}" type="slidenum">
+              <a:rPr lang="en-US" smtClean="0"/>
+              <a:t>5</a:t>
+            </a:fld>
+            <a:endParaRPr lang="en-US"/>
+          </a:p>
+        </p:txBody>
+      </p:sp>
+    </p:spTree>
+    <p:extLst>
+      <p:ext uri="{BB962C8B-B14F-4D97-AF65-F5344CB8AC3E}">
+        <p14:creationId xmlns:p14="http://schemas.microsoft.com/office/powerpoint/2010/main" val="3731289808"/>
       </p:ext>
     </p:extLst>
   </p:cSld>
